--- a/site/lectures/week02-session2.pptx
+++ b/site/lectures/week02-session2.pptx
@@ -11002,8 +11002,8 @@
         </p:blipFill>
         <p:spPr>
           <a:xfrm>
-            <a:off x="548640" y="1389149"/>
-            <a:ext cx="6379289" cy="4193240"/>
+            <a:off x="548640" y="1344114"/>
+            <a:ext cx="6379289" cy="4283309"/>
           </a:xfrm>
           <a:prstGeom prst="rect">
             <a:avLst/>
